--- a/decks/geog-weather-climate/geog-weather-climate_ch1_weather-and-climate.pptx
+++ b/decks/geog-weather-climate/geog-weather-climate_ch1_weather-and-climate.pptx
@@ -125,29 +125,29 @@
   <p:extLst>
     <p:ext uri="{521415D9-36F7-43E2-AB2F-B90AF26B5E84}">
       <p14:sectionLst xmlns:p14="http://schemas.microsoft.com/office/powerpoint/2010/main">
-        <p14:section name="Opening" id="{f5be24d9-a607-7097-4ade-18c43f8657a8}">
+        <p14:section name="Opening" id="{6ce76d50-a0b7-317b-469c-b70ea02f2a27}">
           <p14:sldIdLst>
             <p14:sldId id="256"/>
           </p14:sldIdLst>
         </p14:section>
-        <p14:section name="Gate" id="{73add2d8-0ef3-67c7-81e2-b0570b69a58b}">
+        <p14:section name="Gate" id="{276ecbeb-e876-14d7-3f37-1b957d200391}">
           <p14:sldIdLst>
             <p14:sldId id="257"/>
             <p14:sldId id="258"/>
           </p14:sldIdLst>
         </p14:section>
-        <p14:section name="Pre-teach" id="{d1c8aa7b-4d20-bf38-cc2f-c2ac5bee3d5b}">
+        <p14:section name="Pre-teach" id="{25061da1-5bcd-e203-b8e3-81348d9e2020}">
           <p14:sldIdLst>
             <p14:sldId id="259"/>
           </p14:sldIdLst>
         </p14:section>
-        <p14:section name="Read-along" id="{7addb464-89a0-d8b1-ab02-d0b2cf888eeb}">
+        <p14:section name="Read-along" id="{3972db43-ac63-f0ab-eb5f-c460932a84fc}">
           <p14:sldIdLst>
             <p14:sldId id="260"/>
             <p14:sldId id="261"/>
           </p14:sldIdLst>
         </p14:section>
-        <p14:section name="Teach" id="{66e595ee-5fab-19bf-8656-89f5499d1cdf}">
+        <p14:section name="Teach" id="{5a89ffc8-1357-99dd-8d4c-d87bb3fbc7d1}">
           <p14:sldIdLst>
             <p14:sldId id="262"/>
             <p14:sldId id="263"/>
@@ -156,7 +156,7 @@
             <p14:sldId id="266"/>
           </p14:sldIdLst>
         </p14:section>
-        <p14:section name="Routes" id="{00b4ad65-69ae-f44b-0a26-df9d9ed68484}">
+        <p14:section name="Routes" id="{f7cee3a5-556b-b39f-e3e2-3ffe4cb3bee3}">
           <p14:sldIdLst>
             <p14:sldId id="267"/>
             <p14:sldId id="268"/>
@@ -164,12 +164,12 @@
             <p14:sldId id="270"/>
           </p14:sldIdLst>
         </p14:section>
-        <p14:section name="Close" id="{4b3eb9da-59a8-5060-edbb-b501540d0abc}">
+        <p14:section name="Close" id="{c4da2aec-0aae-01d3-c5b0-cad1ba88f4f2}">
           <p14:sldIdLst>
             <p14:sldId id="271"/>
           </p14:sldIdLst>
         </p14:section>
-        <p14:section name="Answers" id="{fb83ea87-586c-6b6c-47d5-eb13cd7ad378}">
+        <p14:section name="Answers" id="{feec81c3-c3df-9025-3bd8-8057d7064ec9}">
           <p14:sldIdLst>
             <p14:sldId id="272"/>
             <p14:sldId id="273"/>
